--- a/docs/pitch-decks/investor-100/pptx/121-idb-lab.pptx
+++ b/docs/pitch-decks/investor-100/pptx/121-idb-lab.pptx
@@ -1967,7 +1967,7 @@
                   <a:srgbClr val="8B8FA3"/>
                 </a:solidFill>
               </a:rPr>
-              <a:t>Development Finance / Venture · Washington, DC · Early Stage (Equity, Loans, Grants) · IDB Group ($20B+ annual) AUM</a:t>
+              <a:t>Development Finance (Grants + Equity) · Washington, DC · Grants $750K–$2M / Equity · IDB Group ($20B+ annual) AUM</a:t>
             </a:r>
             <a:endParaRPr lang="en-US" sz="1200" dirty="0"/>
           </a:p>
@@ -2215,7 +2215,7 @@
                   <a:srgbClr val="8B8FA3"/>
                 </a:solidFill>
               </a:rPr>
-              <a:t>Personalized for IDB Lab (Inter-American Development Bank) — Sovereign AI governance for Latin American governments and financial institutions</a:t>
+              <a:t>Personalized for IDB Lab (Inter-American Development Bank) — Ecosystem-level AI governance for LatAm financial inclusion, climate risk, and gender equity</a:t>
             </a:r>
             <a:endParaRPr lang="en-US" sz="1400" dirty="0"/>
           </a:p>
@@ -2770,7 +2770,7 @@
                   <a:srgbClr val="8B8FA3"/>
                 </a:solidFill>
               </a:rPr>
-              <a:t>Innovation arm of the IDB Group. Invests in technology solving development challenges in Latin America and the Caribbean. Active responsible AI initiative for the region. CEO: Graham Macmillan.</a:t>
+              <a:t>Innovation arm of the IDB Group. Funds ecosystem-level technology projects across 26 LatAm/Caribbean countries. Active responsible AI initiative. Focus areas: financial inclusion, climate resilience, gender equity. CEO: Graham Macmillan.</a:t>
             </a:r>
             <a:endParaRPr lang="en-US" sz="1200" dirty="0"/>
           </a:p>
@@ -2867,7 +2867,7 @@
                   <a:srgbClr val="8B8FA3"/>
                 </a:solidFill>
               </a:rPr>
-              <a:t>IDB Lab has an active responsible AI initiative for Latin America and features "Gender, AI, and Decision-Making" on their homepage. Brazil's AI Act, Mexico's AI strategy, and regional governance frameworks create demand for AI decision evidence infrastructure across 26 LatAm countries.</a:t>
+              <a:t>IDB Lab funds ecosystem-level AI governance infrastructure — not individual startups. Datacendia deploys as open-source sovereign AI governance across LatAm fintech ecosystems: bias detection for AI lending (expanding financial access to underserved segments), climate risk AI governance for green finance (TCFD/TNFD compliance), and gender-disaggregated impact assessment. Multi-stakeholder: partner with central banks, fintechs, and universities across Brazil, Mexico, Colombia.</a:t>
             </a:r>
             <a:endParaRPr lang="en-US" sz="1100" dirty="0"/>
           </a:p>
@@ -3001,7 +3001,25 @@
                   <a:srgbClr val="D4AF37"/>
                 </a:solidFill>
               </a:rPr>
-              <a:t>100+ portfolio companies across LatAm/Caribbean</a:t>
+              <a:t>fAIr LAC (Responsible AI initiative)</a:t>
+            </a:r>
+            <a:endParaRPr lang="en-US" sz="1100" dirty="0"/>
+          </a:p>
+          <a:p>
+            <a:pPr marL="342900" indent="-342900">
+              <a:lnSpc>
+                <a:spcPct val="140000"/>
+              </a:lnSpc>
+              <a:buSzPct val="100000"/>
+              <a:buChar char="✓"/>
+            </a:pPr>
+            <a:r>
+              <a:rPr lang="en-US" sz="1100" dirty="0">
+                <a:solidFill>
+                  <a:srgbClr val="D4AF37"/>
+                </a:solidFill>
+              </a:rPr>
+              <a:t>100+ ecosystem projects</a:t>
             </a:r>
             <a:endParaRPr lang="en-US" sz="1100" dirty="0"/>
           </a:p>
@@ -3040,7 +3058,7 @@
                   <a:srgbClr val="8B8FA3"/>
                 </a:solidFill>
               </a:rPr>
-              <a:t>IDB Lab invests in tech solving development challenges across 26 LatAm countries. Datacendia provides sovereign AI governance infrastructure — air-gapped deployment, multi-language support (26 languages including Spanish and Portuguese), and compliance mapping for regional AI regulations.</a:t>
+              <a:t>Datacendia is open-source AI governance infrastructure deployable across 26 LatAm countries. Three IDB Lab impact challenges in one platform: (1) Financial inclusion — fairness evidence for AI lending prevents discrimination against women and underserved populations, (2) Climate — decision evidence for ESG scoring and green lending models, (3) Gender — bias detection and gender-disaggregated AI audit trails. Sovereign deployment: data stays in-country, supports Spanish and Portuguese, maps to Brazil LGPD and regional AI regulations.</a:t>
             </a:r>
             <a:endParaRPr lang="en-US" sz="1100" dirty="0"/>
           </a:p>
@@ -4176,7 +4194,7 @@
                   <a:srgbClr val="FFFFFF"/>
                 </a:solidFill>
               </a:rPr>
-              <a:t>Sovereign AI governance for Latin American governments and financial institutions</a:t>
+              <a:t>Ecosystem-level AI governance for LatAm financial inclusion, climate risk, and gender equity</a:t>
             </a:r>
             <a:endParaRPr lang="en-US" sz="1400" dirty="0"/>
           </a:p>
@@ -4234,7 +4252,7 @@
                   <a:srgbClr val="8B8FA3"/>
                 </a:solidFill>
               </a:rPr>
-              <a:t>Sector: Development Finance / Sovereign AI</a:t>
+              <a:t>Sector: Development Finance / Responsible AI</a:t>
             </a:r>
             <a:endParaRPr lang="en-US" sz="1200" dirty="0"/>
           </a:p>

--- a/docs/pitch-decks/investor-100/pptx/121-idb-lab.pptx
+++ b/docs/pitch-decks/investor-100/pptx/121-idb-lab.pptx
@@ -1908,7 +1908,7 @@
                   <a:srgbClr val="8B8FA3"/>
                 </a:solidFill>
               </a:rPr>
-              <a:t>Decision Crisis Immunization Infrastructure</a:t>
+              <a:t>Sovereign AI Decision Evidence Infrastructure</a:t>
             </a:r>
             <a:endParaRPr lang="en-US" sz="1500" dirty="0"/>
           </a:p>
@@ -3346,7 +3346,7 @@
                   <a:srgbClr val="8B8FA3"/>
                 </a:solidFill>
               </a:rPr>
-              <a:t>DORA requires AI operational resilience for financial services by Jan 2025</a:t>
+              <a:t>DORA (in effect since Jan 2025) requires AI operational resilience for all financial services</a:t>
             </a:r>
             <a:endParaRPr lang="en-US" sz="1300" dirty="0"/>
           </a:p>
